--- a/figures/pptx/Figure_3.pptx
+++ b/figures/pptx/Figure_3.pptx
@@ -197,7 +197,7 @@
           <a:p>
             <a:fld id="{A0EC9868-0A20-004D-A863-27AA0DE92D23}" type="datetimeFigureOut">
               <a:rPr lang="fr-FR" smtClean="0"/>
-              <a:t>31/07/2025</a:t>
+              <a:t>08/08/2025</a:t>
             </a:fld>
             <a:endParaRPr lang="fr-FR"/>
           </a:p>
@@ -679,7 +679,7 @@
           <a:p>
             <a:fld id="{ED160DB6-C0DC-8946-AD05-C0754294CFDE}" type="datetimeFigureOut">
               <a:rPr lang="fr-FR" smtClean="0"/>
-              <a:t>31/07/2025</a:t>
+              <a:t>08/08/2025</a:t>
             </a:fld>
             <a:endParaRPr lang="fr-FR"/>
           </a:p>
@@ -849,7 +849,7 @@
           <a:p>
             <a:fld id="{ED160DB6-C0DC-8946-AD05-C0754294CFDE}" type="datetimeFigureOut">
               <a:rPr lang="fr-FR" smtClean="0"/>
-              <a:t>31/07/2025</a:t>
+              <a:t>08/08/2025</a:t>
             </a:fld>
             <a:endParaRPr lang="fr-FR"/>
           </a:p>
@@ -1029,7 +1029,7 @@
           <a:p>
             <a:fld id="{ED160DB6-C0DC-8946-AD05-C0754294CFDE}" type="datetimeFigureOut">
               <a:rPr lang="fr-FR" smtClean="0"/>
-              <a:t>31/07/2025</a:t>
+              <a:t>08/08/2025</a:t>
             </a:fld>
             <a:endParaRPr lang="fr-FR"/>
           </a:p>
@@ -1199,7 +1199,7 @@
           <a:p>
             <a:fld id="{ED160DB6-C0DC-8946-AD05-C0754294CFDE}" type="datetimeFigureOut">
               <a:rPr lang="fr-FR" smtClean="0"/>
-              <a:t>31/07/2025</a:t>
+              <a:t>08/08/2025</a:t>
             </a:fld>
             <a:endParaRPr lang="fr-FR"/>
           </a:p>
@@ -1445,7 +1445,7 @@
           <a:p>
             <a:fld id="{ED160DB6-C0DC-8946-AD05-C0754294CFDE}" type="datetimeFigureOut">
               <a:rPr lang="fr-FR" smtClean="0"/>
-              <a:t>31/07/2025</a:t>
+              <a:t>08/08/2025</a:t>
             </a:fld>
             <a:endParaRPr lang="fr-FR"/>
           </a:p>
@@ -1677,7 +1677,7 @@
           <a:p>
             <a:fld id="{ED160DB6-C0DC-8946-AD05-C0754294CFDE}" type="datetimeFigureOut">
               <a:rPr lang="fr-FR" smtClean="0"/>
-              <a:t>31/07/2025</a:t>
+              <a:t>08/08/2025</a:t>
             </a:fld>
             <a:endParaRPr lang="fr-FR"/>
           </a:p>
@@ -2044,7 +2044,7 @@
           <a:p>
             <a:fld id="{ED160DB6-C0DC-8946-AD05-C0754294CFDE}" type="datetimeFigureOut">
               <a:rPr lang="fr-FR" smtClean="0"/>
-              <a:t>31/07/2025</a:t>
+              <a:t>08/08/2025</a:t>
             </a:fld>
             <a:endParaRPr lang="fr-FR"/>
           </a:p>
@@ -2162,7 +2162,7 @@
           <a:p>
             <a:fld id="{ED160DB6-C0DC-8946-AD05-C0754294CFDE}" type="datetimeFigureOut">
               <a:rPr lang="fr-FR" smtClean="0"/>
-              <a:t>31/07/2025</a:t>
+              <a:t>08/08/2025</a:t>
             </a:fld>
             <a:endParaRPr lang="fr-FR"/>
           </a:p>
@@ -2257,7 +2257,7 @@
           <a:p>
             <a:fld id="{ED160DB6-C0DC-8946-AD05-C0754294CFDE}" type="datetimeFigureOut">
               <a:rPr lang="fr-FR" smtClean="0"/>
-              <a:t>31/07/2025</a:t>
+              <a:t>08/08/2025</a:t>
             </a:fld>
             <a:endParaRPr lang="fr-FR"/>
           </a:p>
@@ -2534,7 +2534,7 @@
           <a:p>
             <a:fld id="{ED160DB6-C0DC-8946-AD05-C0754294CFDE}" type="datetimeFigureOut">
               <a:rPr lang="fr-FR" smtClean="0"/>
-              <a:t>31/07/2025</a:t>
+              <a:t>08/08/2025</a:t>
             </a:fld>
             <a:endParaRPr lang="fr-FR"/>
           </a:p>
@@ -2791,7 +2791,7 @@
           <a:p>
             <a:fld id="{ED160DB6-C0DC-8946-AD05-C0754294CFDE}" type="datetimeFigureOut">
               <a:rPr lang="fr-FR" smtClean="0"/>
-              <a:t>31/07/2025</a:t>
+              <a:t>08/08/2025</a:t>
             </a:fld>
             <a:endParaRPr lang="fr-FR"/>
           </a:p>
@@ -3004,7 +3004,7 @@
           <a:p>
             <a:fld id="{ED160DB6-C0DC-8946-AD05-C0754294CFDE}" type="datetimeFigureOut">
               <a:rPr lang="fr-FR" smtClean="0"/>
-              <a:t>31/07/2025</a:t>
+              <a:t>08/08/2025</a:t>
             </a:fld>
             <a:endParaRPr lang="fr-FR"/>
           </a:p>
@@ -3409,36 +3409,6 @@
           <a:chExt cx="0" cy="0"/>
         </a:xfrm>
       </p:grpSpPr>
-      <p:pic>
-        <p:nvPicPr>
-          <p:cNvPr id="4" name="Image 3">
-            <a:extLst>
-              <a:ext uri="{FF2B5EF4-FFF2-40B4-BE49-F238E27FC236}">
-                <a16:creationId xmlns:a16="http://schemas.microsoft.com/office/drawing/2014/main" id="{B212C31A-1708-6FFD-2EF0-1AE112CFA44D}"/>
-              </a:ext>
-            </a:extLst>
-          </p:cNvPr>
-          <p:cNvPicPr>
-            <a:picLocks noChangeAspect="1"/>
-          </p:cNvPicPr>
-          <p:nvPr/>
-        </p:nvPicPr>
-        <p:blipFill>
-          <a:blip r:embed="rId3"/>
-          <a:stretch>
-            <a:fillRect/>
-          </a:stretch>
-        </p:blipFill>
-        <p:spPr>
-          <a:xfrm>
-            <a:off x="495" y="0"/>
-            <a:ext cx="3059709" cy="1439863"/>
-          </a:xfrm>
-          <a:prstGeom prst="rect">
-            <a:avLst/>
-          </a:prstGeom>
-        </p:spPr>
-      </p:pic>
       <p:sp>
         <p:nvSpPr>
           <p:cNvPr id="20" name="ZoneTexte 19">
@@ -3559,7 +3529,7 @@
           <p:nvPr/>
         </p:nvPicPr>
         <p:blipFill>
-          <a:blip r:embed="rId4"/>
+          <a:blip r:embed="rId3"/>
           <a:srcRect l="21918" t="40190" r="19065" b="44541"/>
           <a:stretch>
             <a:fillRect/>
@@ -3645,6 +3615,36 @@
           </a:p>
         </p:txBody>
       </p:sp>
+      <p:pic>
+        <p:nvPicPr>
+          <p:cNvPr id="3" name="Image 2">
+            <a:extLst>
+              <a:ext uri="{FF2B5EF4-FFF2-40B4-BE49-F238E27FC236}">
+                <a16:creationId xmlns:a16="http://schemas.microsoft.com/office/drawing/2014/main" id="{0B525AE6-2F1F-F174-060B-A5FF17032EB3}"/>
+              </a:ext>
+            </a:extLst>
+          </p:cNvPr>
+          <p:cNvPicPr>
+            <a:picLocks noChangeAspect="1"/>
+          </p:cNvPicPr>
+          <p:nvPr/>
+        </p:nvPicPr>
+        <p:blipFill>
+          <a:blip r:embed="rId4"/>
+          <a:stretch>
+            <a:fillRect/>
+          </a:stretch>
+        </p:blipFill>
+        <p:spPr>
+          <a:xfrm>
+            <a:off x="495" y="0"/>
+            <a:ext cx="3059709" cy="1439863"/>
+          </a:xfrm>
+          <a:prstGeom prst="rect">
+            <a:avLst/>
+          </a:prstGeom>
+        </p:spPr>
+      </p:pic>
     </p:spTree>
     <p:extLst>
       <p:ext uri="{BB962C8B-B14F-4D97-AF65-F5344CB8AC3E}">
